--- a/dakka-interactive-research-proposal-powerpoint-2024-07-22-22-13-28-utc/Main File/Dakka - Research Proposal Powerpoint.pptx
+++ b/dakka-interactive-research-proposal-powerpoint-2024-07-22-22-13-28-utc/Main File/Dakka - Research Proposal Powerpoint.pptx
@@ -259,6 +259,35 @@
           </a:p>
         </p:txBody>
       </p:sp>
+      <p:sp>
+        <p:nvSpPr>
+          <p:cNvPr id="4" name="Slide Number Placeholder 3">
+            <a:extLst>
+              <a:ext uri="{FF2B5EF4-FFF2-40B4-BE49-F238E27FC236}">
+                <a16:creationId xmlns:a16="http://schemas.microsoft.com/office/drawing/2014/main" id="{57A88401-93F6-41F4-959A-10A2992A9D86}"/>
+              </a:ext>
+            </a:extLst>
+          </p:cNvPr>
+          <p:cNvSpPr>
+            <a:spLocks noGrp="1"/>
+          </p:cNvSpPr>
+          <p:nvPr>
+            <p:ph type="sldNum" sz="quarter" idx="13"/>
+          </p:nvPr>
+        </p:nvSpPr>
+        <p:spPr/>
+        <p:txBody>
+          <a:bodyPr/>
+          <a:lstStyle/>
+          <a:p>
+            <a:fld id="{3D1E1754-02FA-1840-B338-EDEA88C1269F}" type="slidenum">
+              <a:rPr lang="en-US" smtClean="0"/>
+              <a:t>‹#›</a:t>
+            </a:fld>
+            <a:endParaRPr lang="en-US"/>
+          </a:p>
+        </p:txBody>
+      </p:sp>
     </p:spTree>
     <p:extLst>
       <p:ext uri="{BB962C8B-B14F-4D97-AF65-F5344CB8AC3E}">
@@ -366,6 +395,35 @@
           </a:lstStyle>
           <a:p>
             <a:endParaRPr lang="en-US" dirty="0"/>
+          </a:p>
+        </p:txBody>
+      </p:sp>
+      <p:sp>
+        <p:nvSpPr>
+          <p:cNvPr id="5" name="Slide Number Placeholder 4">
+            <a:extLst>
+              <a:ext uri="{FF2B5EF4-FFF2-40B4-BE49-F238E27FC236}">
+                <a16:creationId xmlns:a16="http://schemas.microsoft.com/office/drawing/2014/main" id="{A59D461E-70F2-4E5D-8683-D9674C526A60}"/>
+              </a:ext>
+            </a:extLst>
+          </p:cNvPr>
+          <p:cNvSpPr>
+            <a:spLocks noGrp="1"/>
+          </p:cNvSpPr>
+          <p:nvPr>
+            <p:ph type="sldNum" sz="quarter" idx="13"/>
+          </p:nvPr>
+        </p:nvSpPr>
+        <p:spPr/>
+        <p:txBody>
+          <a:bodyPr/>
+          <a:lstStyle/>
+          <a:p>
+            <a:fld id="{3D1E1754-02FA-1840-B338-EDEA88C1269F}" type="slidenum">
+              <a:rPr lang="en-US" smtClean="0"/>
+              <a:t>‹#›</a:t>
+            </a:fld>
+            <a:endParaRPr lang="en-US"/>
           </a:p>
         </p:txBody>
       </p:sp>
@@ -583,6 +641,35 @@
           </a:p>
         </p:txBody>
       </p:sp>
+      <p:sp>
+        <p:nvSpPr>
+          <p:cNvPr id="4" name="Slide Number Placeholder 3">
+            <a:extLst>
+              <a:ext uri="{FF2B5EF4-FFF2-40B4-BE49-F238E27FC236}">
+                <a16:creationId xmlns:a16="http://schemas.microsoft.com/office/drawing/2014/main" id="{A863A49D-29BB-4646-A699-9E79D4D9F82A}"/>
+              </a:ext>
+            </a:extLst>
+          </p:cNvPr>
+          <p:cNvSpPr>
+            <a:spLocks noGrp="1"/>
+          </p:cNvSpPr>
+          <p:nvPr>
+            <p:ph type="sldNum" sz="quarter" idx="15"/>
+          </p:nvPr>
+        </p:nvSpPr>
+        <p:spPr/>
+        <p:txBody>
+          <a:bodyPr/>
+          <a:lstStyle/>
+          <a:p>
+            <a:fld id="{3D1E1754-02FA-1840-B338-EDEA88C1269F}" type="slidenum">
+              <a:rPr lang="en-US" smtClean="0"/>
+              <a:t>‹#›</a:t>
+            </a:fld>
+            <a:endParaRPr lang="en-US"/>
+          </a:p>
+        </p:txBody>
+      </p:sp>
     </p:spTree>
     <p:extLst>
       <p:ext uri="{BB962C8B-B14F-4D97-AF65-F5344CB8AC3E}">
@@ -690,6 +777,35 @@
           </a:lstStyle>
           <a:p>
             <a:endParaRPr lang="en-US" dirty="0"/>
+          </a:p>
+        </p:txBody>
+      </p:sp>
+      <p:sp>
+        <p:nvSpPr>
+          <p:cNvPr id="4" name="Slide Number Placeholder 3">
+            <a:extLst>
+              <a:ext uri="{FF2B5EF4-FFF2-40B4-BE49-F238E27FC236}">
+                <a16:creationId xmlns:a16="http://schemas.microsoft.com/office/drawing/2014/main" id="{96901343-DA15-4AE9-8C32-384A4DDA4D7D}"/>
+              </a:ext>
+            </a:extLst>
+          </p:cNvPr>
+          <p:cNvSpPr>
+            <a:spLocks noGrp="1"/>
+          </p:cNvSpPr>
+          <p:nvPr>
+            <p:ph type="sldNum" sz="quarter" idx="13"/>
+          </p:nvPr>
+        </p:nvSpPr>
+        <p:spPr/>
+        <p:txBody>
+          <a:bodyPr/>
+          <a:lstStyle/>
+          <a:p>
+            <a:fld id="{3D1E1754-02FA-1840-B338-EDEA88C1269F}" type="slidenum">
+              <a:rPr lang="en-US" smtClean="0"/>
+              <a:t>‹#›</a:t>
+            </a:fld>
+            <a:endParaRPr lang="en-US"/>
           </a:p>
         </p:txBody>
       </p:sp>
@@ -803,6 +919,35 @@
           </a:p>
         </p:txBody>
       </p:sp>
+      <p:sp>
+        <p:nvSpPr>
+          <p:cNvPr id="5" name="Slide Number Placeholder 4">
+            <a:extLst>
+              <a:ext uri="{FF2B5EF4-FFF2-40B4-BE49-F238E27FC236}">
+                <a16:creationId xmlns:a16="http://schemas.microsoft.com/office/drawing/2014/main" id="{E125DBA9-7227-42A7-9342-343CC53F9765}"/>
+              </a:ext>
+            </a:extLst>
+          </p:cNvPr>
+          <p:cNvSpPr>
+            <a:spLocks noGrp="1"/>
+          </p:cNvSpPr>
+          <p:nvPr>
+            <p:ph type="sldNum" sz="quarter" idx="13"/>
+          </p:nvPr>
+        </p:nvSpPr>
+        <p:spPr/>
+        <p:txBody>
+          <a:bodyPr/>
+          <a:lstStyle/>
+          <a:p>
+            <a:fld id="{3D1E1754-02FA-1840-B338-EDEA88C1269F}" type="slidenum">
+              <a:rPr lang="en-US" smtClean="0"/>
+              <a:t>‹#›</a:t>
+            </a:fld>
+            <a:endParaRPr lang="en-US"/>
+          </a:p>
+        </p:txBody>
+      </p:sp>
     </p:spTree>
     <p:extLst>
       <p:ext uri="{BB962C8B-B14F-4D97-AF65-F5344CB8AC3E}">
@@ -966,6 +1111,35 @@
           </a:lstStyle>
           <a:p>
             <a:endParaRPr lang="en-US" dirty="0"/>
+          </a:p>
+        </p:txBody>
+      </p:sp>
+      <p:sp>
+        <p:nvSpPr>
+          <p:cNvPr id="6" name="Slide Number Placeholder 5">
+            <a:extLst>
+              <a:ext uri="{FF2B5EF4-FFF2-40B4-BE49-F238E27FC236}">
+                <a16:creationId xmlns:a16="http://schemas.microsoft.com/office/drawing/2014/main" id="{35DC9500-1D1F-4F53-94AB-F54550063239}"/>
+              </a:ext>
+            </a:extLst>
+          </p:cNvPr>
+          <p:cNvSpPr>
+            <a:spLocks noGrp="1"/>
+          </p:cNvSpPr>
+          <p:nvPr>
+            <p:ph type="sldNum" sz="quarter" idx="13"/>
+          </p:nvPr>
+        </p:nvSpPr>
+        <p:spPr/>
+        <p:txBody>
+          <a:bodyPr/>
+          <a:lstStyle/>
+          <a:p>
+            <a:fld id="{3D1E1754-02FA-1840-B338-EDEA88C1269F}" type="slidenum">
+              <a:rPr lang="en-US" smtClean="0"/>
+              <a:t>‹#›</a:t>
+            </a:fld>
+            <a:endParaRPr lang="en-US"/>
           </a:p>
         </p:txBody>
       </p:sp>
@@ -2002,6 +2176,35 @@
           </a:lstStyle>
           <a:p>
             <a:endParaRPr lang="en-US" dirty="0"/>
+          </a:p>
+        </p:txBody>
+      </p:sp>
+      <p:sp>
+        <p:nvSpPr>
+          <p:cNvPr id="4" name="Slide Number Placeholder 3">
+            <a:extLst>
+              <a:ext uri="{FF2B5EF4-FFF2-40B4-BE49-F238E27FC236}">
+                <a16:creationId xmlns:a16="http://schemas.microsoft.com/office/drawing/2014/main" id="{65589B77-B524-43B8-959C-3401E9CA88F5}"/>
+              </a:ext>
+            </a:extLst>
+          </p:cNvPr>
+          <p:cNvSpPr>
+            <a:spLocks noGrp="1"/>
+          </p:cNvSpPr>
+          <p:nvPr>
+            <p:ph type="sldNum" sz="quarter" idx="15"/>
+          </p:nvPr>
+        </p:nvSpPr>
+        <p:spPr/>
+        <p:txBody>
+          <a:bodyPr/>
+          <a:lstStyle/>
+          <a:p>
+            <a:fld id="{3D1E1754-02FA-1840-B338-EDEA88C1269F}" type="slidenum">
+              <a:rPr lang="en-US" smtClean="0"/>
+              <a:t>‹#›</a:t>
+            </a:fld>
+            <a:endParaRPr lang="en-US"/>
           </a:p>
         </p:txBody>
       </p:sp>
@@ -2214,7 +2417,7 @@
           <a:p>
             <a:fld id="{6DE46585-4107-5342-9F4B-ECFCA1163E9A}" type="datetimeFigureOut">
               <a:rPr lang="en-US" smtClean="0"/>
-              <a:t>7/18/24</a:t>
+              <a:t>6/7/2026</a:t>
             </a:fld>
             <a:endParaRPr lang="en-US"/>
           </a:p>
@@ -41798,7 +42001,7 @@
         <p:spPr>
           <a:xfrm>
             <a:off x="659628" y="4219566"/>
-            <a:ext cx="10987765" cy="1855316"/>
+            <a:ext cx="10987765" cy="1568763"/>
           </a:xfrm>
           <a:prstGeom prst="rect">
             <a:avLst/>
@@ -41817,18 +42020,13 @@
               </a:lnSpc>
             </a:pPr>
             <a:r>
-              <a:rPr lang="en-US" sz="14000">
+              <a:rPr lang="en-US" sz="11700" dirty="0">
                 <a:solidFill>
                   <a:srgbClr val="2A2A2A"/>
                 </a:solidFill>
               </a:rPr>
               <a:t>METHODOLOGY</a:t>
             </a:r>
-            <a:endParaRPr lang="en-US" sz="14000" dirty="0">
-              <a:solidFill>
-                <a:srgbClr val="2A2A2A"/>
-              </a:solidFill>
-            </a:endParaRPr>
           </a:p>
         </p:txBody>
       </p:sp>
